--- a/curriculum/M03/W02/L02/slides.pptx
+++ b/curriculum/M03/W02/L02/slides.pptx
@@ -12903,11 +12903,40 @@
                 <a:ea typeface="Malgun Gothic"/>
                 <a:cs typeface="Malgun Gothic"/>
               </a:rPr>
-              <a:t>: Holoenzyme이나 개시 전 복합체가 promoter에 결합한다. 이 단계에서 DNA는 아직 이중나선 그대로다. 2. </a:t>
-            </a:r>
+              <a:t>: Holoenzyme이나 개시 전 복합체가 promoter에 결합한다. 이 단계에서 DNA는 아직 이중나선 그대로다.</a:t>
+            </a:r>
+          </a:p>
+          <a:p>
+            <a:pPr>
+              <a:spcAft>
+                <a:spcPts val="900"/>
+              </a:spcAft>
+            </a:pPr>
             <a:r>
               <a:rPr sz="1400" b="1" i="0">
                 <a:solidFill>
+                  <a:srgbClr val="F2B705"/>
+                </a:solidFill>
+                <a:latin typeface="Malgun Gothic"/>
+                <a:ea typeface="Malgun Gothic"/>
+                <a:cs typeface="Malgun Gothic"/>
+              </a:rPr>
+              <a:t>•  </a:t>
+            </a:r>
+            <a:r>
+              <a:rPr sz="1400" b="0" i="0">
+                <a:solidFill>
+                  <a:srgbClr val="11202B"/>
+                </a:solidFill>
+                <a:latin typeface="Malgun Gothic"/>
+                <a:ea typeface="Malgun Gothic"/>
+                <a:cs typeface="Malgun Gothic"/>
+              </a:rPr>
+              <a:t>2. </a:t>
+            </a:r>
+            <a:r>
+              <a:rPr sz="1400" b="1" i="0">
+                <a:solidFill>
                   <a:srgbClr val="11202B"/>
                 </a:solidFill>
                 <a:latin typeface="Malgun Gothic"/>
@@ -12947,11 +12976,40 @@
                 <a:ea typeface="Malgun Gothic"/>
                 <a:cs typeface="Malgun Gothic"/>
               </a:rPr>
-              <a:t> 이 생긴다. 세균에서는 σ가 이 풀림을 돕고, 진핵 Pol II에서는 TFIIH의 helicase 활성이 담당한다. 3. </a:t>
-            </a:r>
+              <a:t> 이 생긴다. 세균에서는 σ가 이 풀림을 돕고, 진핵 Pol II에서는 TFIIH의 helicase 활성이 담당한다.</a:t>
+            </a:r>
+          </a:p>
+          <a:p>
+            <a:pPr>
+              <a:spcAft>
+                <a:spcPts val="900"/>
+              </a:spcAft>
+            </a:pPr>
             <a:r>
               <a:rPr sz="1400" b="1" i="0">
                 <a:solidFill>
+                  <a:srgbClr val="F2B705"/>
+                </a:solidFill>
+                <a:latin typeface="Malgun Gothic"/>
+                <a:ea typeface="Malgun Gothic"/>
+                <a:cs typeface="Malgun Gothic"/>
+              </a:rPr>
+              <a:t>•  </a:t>
+            </a:r>
+            <a:r>
+              <a:rPr sz="1400" b="0" i="0">
+                <a:solidFill>
+                  <a:srgbClr val="11202B"/>
+                </a:solidFill>
+                <a:latin typeface="Malgun Gothic"/>
+                <a:ea typeface="Malgun Gothic"/>
+                <a:cs typeface="Malgun Gothic"/>
+              </a:rPr>
+              <a:t>3. </a:t>
+            </a:r>
+            <a:r>
+              <a:rPr sz="1400" b="1" i="0">
+                <a:solidFill>
                   <a:srgbClr val="11202B"/>
                 </a:solidFill>
                 <a:latin typeface="Malgun Gothic"/>
@@ -12969,7 +13027,36 @@
                 <a:ea typeface="Malgun Gothic"/>
                 <a:cs typeface="Malgun Gothic"/>
               </a:rPr>
-              <a:t>: Primer 없이 첫 뉴클레오타이드가 놓이고 짧은 RNA가 만들어진다. 이 단계에서는 합성이 자주 중단되고 짧은 산물이 버려진다(abortive initiation). 4. </a:t>
+              <a:t>: Primer 없이 첫 뉴클레오타이드가 놓이고 짧은 RNA가 만들어진다. 이 단계에서는 합성이 자주 중단되고 짧은 산물이 버려진다(abortive initiation).</a:t>
+            </a:r>
+          </a:p>
+          <a:p>
+            <a:pPr>
+              <a:spcAft>
+                <a:spcPts val="900"/>
+              </a:spcAft>
+            </a:pPr>
+            <a:r>
+              <a:rPr sz="1400" b="1" i="0">
+                <a:solidFill>
+                  <a:srgbClr val="F2B705"/>
+                </a:solidFill>
+                <a:latin typeface="Malgun Gothic"/>
+                <a:ea typeface="Malgun Gothic"/>
+                <a:cs typeface="Malgun Gothic"/>
+              </a:rPr>
+              <a:t>•  </a:t>
+            </a:r>
+            <a:r>
+              <a:rPr sz="1400" b="0" i="0">
+                <a:solidFill>
+                  <a:srgbClr val="11202B"/>
+                </a:solidFill>
+                <a:latin typeface="Malgun Gothic"/>
+                <a:ea typeface="Malgun Gothic"/>
+                <a:cs typeface="Malgun Gothic"/>
+              </a:rPr>
+              <a:t>4. </a:t>
             </a:r>
             <a:r>
               <a:rPr sz="1400" b="1" i="0">
@@ -15630,29 +15717,7 @@
                 <a:ea typeface="Malgun Gothic"/>
                 <a:cs typeface="Malgun Gothic"/>
               </a:rPr>
-              <a:t>: 전사된 RNA에 GC가 풍부한 역반복 서열이 있어 스스로 머리핀을 만든다. 이 구조가 polymerase의 전진을 멈춘다. 2. </a:t>
-            </a:r>
-            <a:r>
-              <a:rPr sz="1400" b="1" i="0">
-                <a:solidFill>
-                  <a:srgbClr val="11202B"/>
-                </a:solidFill>
-                <a:latin typeface="Malgun Gothic"/>
-                <a:ea typeface="Malgun Gothic"/>
-                <a:cs typeface="Malgun Gothic"/>
-              </a:rPr>
-              <a:t>U가 이어진 구간</a:t>
-            </a:r>
-            <a:r>
-              <a:rPr sz="1400" b="0" i="0">
-                <a:solidFill>
-                  <a:srgbClr val="11202B"/>
-                </a:solidFill>
-                <a:latin typeface="Malgun Gothic"/>
-                <a:ea typeface="Malgun Gothic"/>
-                <a:cs typeface="Malgun Gothic"/>
-              </a:rPr>
-              <a:t>: 머리핀 바로 뒤에 U가 여러 개 이어진다. A–U 염기쌍은 약하므로 RNA–DNA 잡종이 불안정해지고, 멈춘 상태에서 RNA가 주형에서 떨어진다.</a:t>
+              <a:t>: 전사된 RNA에 GC가 풍부한 역반복 서열이 있어 스스로 머리핀을 만든다. 이 구조가 polymerase의 전진을 멈춘다.</a:t>
             </a:r>
           </a:p>
           <a:p>
@@ -15681,7 +15746,29 @@
                 <a:ea typeface="Malgun Gothic"/>
                 <a:cs typeface="Malgun Gothic"/>
               </a:rPr>
-              <a:t>두 요소가 모두 필요하다. 머리핀만 있으면 멈추기만 하고 떨어지지 않으며, U 구간만 있으면 멈추지 않는다. 앞 수업의 attenuation에서 종결 구조가 '머리핀 + U 구간'이었던 것이 이 기전이다.</a:t>
+              <a:t>2. </a:t>
+            </a:r>
+            <a:r>
+              <a:rPr sz="1400" b="1" i="0">
+                <a:solidFill>
+                  <a:srgbClr val="11202B"/>
+                </a:solidFill>
+                <a:latin typeface="Malgun Gothic"/>
+                <a:ea typeface="Malgun Gothic"/>
+                <a:cs typeface="Malgun Gothic"/>
+              </a:rPr>
+              <a:t>U가 이어진 구간</a:t>
+            </a:r>
+            <a:r>
+              <a:rPr sz="1400" b="0" i="0">
+                <a:solidFill>
+                  <a:srgbClr val="11202B"/>
+                </a:solidFill>
+                <a:latin typeface="Malgun Gothic"/>
+                <a:ea typeface="Malgun Gothic"/>
+                <a:cs typeface="Malgun Gothic"/>
+              </a:rPr>
+              <a:t>: 머리핀 바로 뒤에 U가 여러 개 이어진다. A–U 염기쌍은 약하므로 RNA–DNA 잡종이 불안정해지고, 멈춘 상태에서 RNA가 주형에서 떨어진다.</a:t>
             </a:r>
           </a:p>
           <a:p>
@@ -15702,17 +15789,6 @@
               <a:t>•  </a:t>
             </a:r>
             <a:r>
-              <a:rPr sz="1400" b="1" i="0">
-                <a:solidFill>
-                  <a:srgbClr val="11202B"/>
-                </a:solidFill>
-                <a:latin typeface="Malgun Gothic"/>
-                <a:ea typeface="Malgun Gothic"/>
-                <a:cs typeface="Malgun Gothic"/>
-              </a:rPr>
-              <a:t>세균의 방식 2: Rho 의존 종결.</a:t>
-            </a:r>
-            <a:r>
               <a:rPr sz="1400" b="0" i="0">
                 <a:solidFill>
                   <a:srgbClr val="11202B"/>
@@ -15721,29 +15797,7 @@
                 <a:ea typeface="Malgun Gothic"/>
                 <a:cs typeface="Malgun Gothic"/>
               </a:rPr>
-              <a:t> </a:t>
-            </a:r>
-            <a:r>
-              <a:rPr sz="1400" b="1" i="0">
-                <a:solidFill>
-                  <a:srgbClr val="11202B"/>
-                </a:solidFill>
-                <a:latin typeface="Malgun Gothic"/>
-                <a:ea typeface="Malgun Gothic"/>
-                <a:cs typeface="Malgun Gothic"/>
-              </a:rPr>
-              <a:t>Rho 단백질</a:t>
-            </a:r>
-            <a:r>
-              <a:rPr sz="1400" b="0" i="0">
-                <a:solidFill>
-                  <a:srgbClr val="11202B"/>
-                </a:solidFill>
-                <a:latin typeface="Malgun Gothic"/>
-                <a:ea typeface="Malgun Gothic"/>
-                <a:cs typeface="Malgun Gothic"/>
-              </a:rPr>
-              <a:t>이 RNA의 특정 구간(rut site)에 결합하고, ATP를 써서 RNA를 따라 polymerase 쪽으로 이동한다. 느려진 polymerase를 따라잡으면 RNA–DNA 잡종을 풀어 전사를 끝낸다. 이 방식에서는 특정한 종결 서열이 필요하지 않다.</a:t>
+              <a:t>두 요소가 모두 필요하다. 머리핀만 있으면 멈추기만 하고 떨어지지 않으며, U 구간만 있으면 멈추지 않는다. 앞 수업의 attenuation에서 종결 구조가 '머리핀 + U 구간'이었던 것이 이 기전이다.</a:t>
             </a:r>
           </a:p>
           <a:p>
@@ -15764,6 +15818,17 @@
               <a:t>•  </a:t>
             </a:r>
             <a:r>
+              <a:rPr sz="1400" b="1" i="0">
+                <a:solidFill>
+                  <a:srgbClr val="11202B"/>
+                </a:solidFill>
+                <a:latin typeface="Malgun Gothic"/>
+                <a:ea typeface="Malgun Gothic"/>
+                <a:cs typeface="Malgun Gothic"/>
+              </a:rPr>
+              <a:t>세균의 방식 2: Rho 의존 종결.</a:t>
+            </a:r>
+            <a:r>
               <a:rPr sz="1400" b="0" i="0">
                 <a:solidFill>
                   <a:srgbClr val="11202B"/>
@@ -15772,7 +15837,7 @@
                 <a:ea typeface="Malgun Gothic"/>
                 <a:cs typeface="Malgun Gothic"/>
               </a:rPr>
-              <a:t>Rho 의존 종결에는 조절상의 의미가 있다. Rho가 RNA에 결합하려면 그 구간이 </a:t>
+              <a:t> </a:t>
             </a:r>
             <a:r>
               <a:rPr sz="1400" b="1" i="0">
@@ -15783,7 +15848,7 @@
                 <a:ea typeface="Malgun Gothic"/>
                 <a:cs typeface="Malgun Gothic"/>
               </a:rPr>
-              <a:t>ribosome에 덮여 있지 않아야 한다.</a:t>
+              <a:t>Rho 단백질</a:t>
             </a:r>
             <a:r>
               <a:rPr sz="1400" b="0" i="0">
@@ -15794,29 +15859,7 @@
                 <a:ea typeface="Malgun Gothic"/>
                 <a:cs typeface="Malgun Gothic"/>
               </a:rPr>
-              <a:t> 번역이 활발하면 ribosome이 RNA를 덮어 Rho의 결합을 막는다. 즉 </a:t>
-            </a:r>
-            <a:r>
-              <a:rPr sz="1400" b="1" i="0">
-                <a:solidFill>
-                  <a:srgbClr val="11202B"/>
-                </a:solidFill>
-                <a:latin typeface="Malgun Gothic"/>
-                <a:ea typeface="Malgun Gothic"/>
-                <a:cs typeface="Malgun Gothic"/>
-              </a:rPr>
-              <a:t>번역이 멈춘 전사체는 종결되어 버려진다.</a:t>
-            </a:r>
-            <a:r>
-              <a:rPr sz="1400" b="0" i="0">
-                <a:solidFill>
-                  <a:srgbClr val="11202B"/>
-                </a:solidFill>
-                <a:latin typeface="Malgun Gothic"/>
-                <a:ea typeface="Malgun Gothic"/>
-                <a:cs typeface="Malgun Gothic"/>
-              </a:rPr>
-              <a:t> 전사와 번역이 같은 공간에서 일어나는 세균에서만 가능한 품질 관리다.</a:t>
+              <a:t>이 RNA의 특정 구간(rut site)에 결합하고, ATP를 써서 RNA를 따라 polymerase 쪽으로 이동한다. 느려진 polymerase를 따라잡으면 RNA–DNA 잡종을 풀어 전사를 끝낸다. 이 방식에서는 특정한 종결 서열이 필요하지 않다.</a:t>
             </a:r>
           </a:p>
           <a:p>
@@ -15837,6 +15880,17 @@
               <a:t>•  </a:t>
             </a:r>
             <a:r>
+              <a:rPr sz="1400" b="0" i="0">
+                <a:solidFill>
+                  <a:srgbClr val="11202B"/>
+                </a:solidFill>
+                <a:latin typeface="Malgun Gothic"/>
+                <a:ea typeface="Malgun Gothic"/>
+                <a:cs typeface="Malgun Gothic"/>
+              </a:rPr>
+              <a:t>Rho 의존 종결에는 조절상의 의미가 있다. Rho가 RNA에 결합하려면 그 구간이 </a:t>
+            </a:r>
+            <a:r>
               <a:rPr sz="1400" b="1" i="0">
                 <a:solidFill>
                   <a:srgbClr val="11202B"/>
@@ -15845,6 +15899,68 @@
                 <a:ea typeface="Malgun Gothic"/>
                 <a:cs typeface="Malgun Gothic"/>
               </a:rPr>
+              <a:t>ribosome에 덮여 있지 않아야 한다.</a:t>
+            </a:r>
+            <a:r>
+              <a:rPr sz="1400" b="0" i="0">
+                <a:solidFill>
+                  <a:srgbClr val="11202B"/>
+                </a:solidFill>
+                <a:latin typeface="Malgun Gothic"/>
+                <a:ea typeface="Malgun Gothic"/>
+                <a:cs typeface="Malgun Gothic"/>
+              </a:rPr>
+              <a:t> 번역이 활발하면 ribosome이 RNA를 덮어 Rho의 결합을 막는다. 즉 </a:t>
+            </a:r>
+            <a:r>
+              <a:rPr sz="1400" b="1" i="0">
+                <a:solidFill>
+                  <a:srgbClr val="11202B"/>
+                </a:solidFill>
+                <a:latin typeface="Malgun Gothic"/>
+                <a:ea typeface="Malgun Gothic"/>
+                <a:cs typeface="Malgun Gothic"/>
+              </a:rPr>
+              <a:t>번역이 멈춘 전사체는 종결되어 버려진다.</a:t>
+            </a:r>
+            <a:r>
+              <a:rPr sz="1400" b="0" i="0">
+                <a:solidFill>
+                  <a:srgbClr val="11202B"/>
+                </a:solidFill>
+                <a:latin typeface="Malgun Gothic"/>
+                <a:ea typeface="Malgun Gothic"/>
+                <a:cs typeface="Malgun Gothic"/>
+              </a:rPr>
+              <a:t> 전사와 번역이 같은 공간에서 일어나는 세균에서만 가능한 품질 관리다.</a:t>
+            </a:r>
+          </a:p>
+          <a:p>
+            <a:pPr>
+              <a:spcAft>
+                <a:spcPts val="900"/>
+              </a:spcAft>
+            </a:pPr>
+            <a:r>
+              <a:rPr sz="1400" b="1" i="0">
+                <a:solidFill>
+                  <a:srgbClr val="F2B705"/>
+                </a:solidFill>
+                <a:latin typeface="Malgun Gothic"/>
+                <a:ea typeface="Malgun Gothic"/>
+                <a:cs typeface="Malgun Gothic"/>
+              </a:rPr>
+              <a:t>•  </a:t>
+            </a:r>
+            <a:r>
+              <a:rPr sz="1400" b="1" i="0">
+                <a:solidFill>
+                  <a:srgbClr val="11202B"/>
+                </a:solidFill>
+                <a:latin typeface="Malgun Gothic"/>
+                <a:ea typeface="Malgun Gothic"/>
+                <a:cs typeface="Malgun Gothic"/>
+              </a:rPr>
               <a:t>진핵 Pol II의 종결</a:t>
             </a:r>
             <a:r>
@@ -15879,6 +15995,75 @@
                 <a:cs typeface="Malgun Gothic"/>
               </a:rPr>
               <a:t>는 점이다.</a:t>
+            </a:r>
+          </a:p>
+          <a:p>
+            <a:pPr>
+              <a:spcAft>
+                <a:spcPts val="900"/>
+              </a:spcAft>
+            </a:pPr>
+            <a:r>
+              <a:rPr sz="1400" b="1" i="0">
+                <a:solidFill>
+                  <a:srgbClr val="F2B705"/>
+                </a:solidFill>
+                <a:latin typeface="Malgun Gothic"/>
+                <a:ea typeface="Malgun Gothic"/>
+                <a:cs typeface="Malgun Gothic"/>
+              </a:rPr>
+              <a:t>•  </a:t>
+            </a:r>
+            <a:r>
+              <a:rPr sz="1400" b="0" i="0">
+                <a:solidFill>
+                  <a:srgbClr val="11202B"/>
+                </a:solidFill>
+                <a:latin typeface="Malgun Gothic"/>
+                <a:ea typeface="Malgun Gothic"/>
+                <a:cs typeface="Malgun Gothic"/>
+              </a:rPr>
+              <a:t>1. Polymerase가 poly(A) 신호 서열(AAUAAA)을 지난다.</a:t>
+            </a:r>
+          </a:p>
+          <a:p>
+            <a:pPr>
+              <a:spcAft>
+                <a:spcPts val="900"/>
+              </a:spcAft>
+            </a:pPr>
+            <a:r>
+              <a:rPr sz="1400" b="1" i="0">
+                <a:solidFill>
+                  <a:srgbClr val="F2B705"/>
+                </a:solidFill>
+                <a:latin typeface="Malgun Gothic"/>
+                <a:ea typeface="Malgun Gothic"/>
+                <a:cs typeface="Malgun Gothic"/>
+              </a:rPr>
+              <a:t>•  </a:t>
+            </a:r>
+            <a:r>
+              <a:rPr sz="1400" b="0" i="0">
+                <a:solidFill>
+                  <a:srgbClr val="11202B"/>
+                </a:solidFill>
+                <a:latin typeface="Malgun Gothic"/>
+                <a:ea typeface="Malgun Gothic"/>
+                <a:cs typeface="Malgun Gothic"/>
+              </a:rPr>
+              <a:t>2. 가공 인자들이 그 서열을 인식하고 RNA를 </a:t>
+            </a:r>
+            <a:r>
+              <a:rPr sz="1400" b="1" i="0">
+                <a:solidFill>
+                  <a:srgbClr val="11202B"/>
+                </a:solidFill>
+                <a:latin typeface="Malgun Gothic"/>
+                <a:ea typeface="Malgun Gothic"/>
+                <a:cs typeface="Malgun Gothic"/>
+              </a:rPr>
+              <a:t>자른다.</a:t>
             </a:r>
           </a:p>
         </p:txBody>
@@ -16174,18 +16359,25 @@
                 <a:ea typeface="Malgun Gothic"/>
                 <a:cs typeface="Malgun Gothic"/>
               </a:rPr>
-              <a:t>1. Polymerase가 poly(A) 신호 서열(AAUAAA)을 지난다. 2. 가공 인자들이 그 서열을 인식하고 RNA를 </a:t>
-            </a:r>
+              <a:t>3. 자른 지점의 상류 조각은 poly(A) 꼬리를 받아 성숙한 mRNA가 된다.</a:t>
+            </a:r>
+          </a:p>
+          <a:p>
+            <a:pPr>
+              <a:spcAft>
+                <a:spcPts val="900"/>
+              </a:spcAft>
+            </a:pPr>
             <a:r>
               <a:rPr sz="1800" b="1" i="0">
                 <a:solidFill>
-                  <a:srgbClr val="11202B"/>
-                </a:solidFill>
-                <a:latin typeface="Malgun Gothic"/>
-                <a:ea typeface="Malgun Gothic"/>
-                <a:cs typeface="Malgun Gothic"/>
-              </a:rPr>
-              <a:t>자른다.</a:t>
+                  <a:srgbClr val="F2B705"/>
+                </a:solidFill>
+                <a:latin typeface="Malgun Gothic"/>
+                <a:ea typeface="Malgun Gothic"/>
+                <a:cs typeface="Malgun Gothic"/>
+              </a:rPr>
+              <a:t>•  </a:t>
             </a:r>
             <a:r>
               <a:rPr sz="1800" b="0" i="0">
@@ -16196,7 +16388,7 @@
                 <a:ea typeface="Malgun Gothic"/>
                 <a:cs typeface="Malgun Gothic"/>
               </a:rPr>
-              <a:t> 3. 자른 지점의 상류 조각은 poly(A) 꼬리를 받아 성숙한 mRNA가 된다. 4. Polymerase는 계속 전사하지만, 새로 만들어지는 RNA는 보호되지 않은 5′ 말단을 가지므로 exonuclease에 분해된다. 분해가 polymerase를 따라잡으면 전사가 끝난다.</a:t>
+              <a:t>4. Polymerase는 계속 전사하지만, 새로 만들어지는 RNA는 보호되지 않은 5′ 말단을 가지므로 exonuclease에 분해된다. 분해가 polymerase를 따라잡으면 전사가 끝난다.</a:t>
             </a:r>
           </a:p>
           <a:p>
@@ -19216,7 +19408,65 @@
                 <a:ea typeface="Malgun Gothic"/>
                 <a:cs typeface="Malgun Gothic"/>
               </a:rPr>
-              <a:t>1. 전사가 줄었다 2. 전사는 그대로인데 mRNA 분해가 빨라졌다 3. 가공이 실패해 성숙한 mRNA가 되지 못했다</a:t>
+              <a:t>1. 전사가 줄었다</a:t>
+            </a:r>
+          </a:p>
+          <a:p>
+            <a:pPr>
+              <a:spcAft>
+                <a:spcPts val="900"/>
+              </a:spcAft>
+            </a:pPr>
+            <a:r>
+              <a:rPr sz="1400" b="1" i="0">
+                <a:solidFill>
+                  <a:srgbClr val="F2B705"/>
+                </a:solidFill>
+                <a:latin typeface="Malgun Gothic"/>
+                <a:ea typeface="Malgun Gothic"/>
+                <a:cs typeface="Malgun Gothic"/>
+              </a:rPr>
+              <a:t>•  </a:t>
+            </a:r>
+            <a:r>
+              <a:rPr sz="1400" b="0" i="0">
+                <a:solidFill>
+                  <a:srgbClr val="11202B"/>
+                </a:solidFill>
+                <a:latin typeface="Malgun Gothic"/>
+                <a:ea typeface="Malgun Gothic"/>
+                <a:cs typeface="Malgun Gothic"/>
+              </a:rPr>
+              <a:t>2. 전사는 그대로인데 mRNA 분해가 빨라졌다</a:t>
+            </a:r>
+          </a:p>
+          <a:p>
+            <a:pPr>
+              <a:spcAft>
+                <a:spcPts val="900"/>
+              </a:spcAft>
+            </a:pPr>
+            <a:r>
+              <a:rPr sz="1400" b="1" i="0">
+                <a:solidFill>
+                  <a:srgbClr val="F2B705"/>
+                </a:solidFill>
+                <a:latin typeface="Malgun Gothic"/>
+                <a:ea typeface="Malgun Gothic"/>
+                <a:cs typeface="Malgun Gothic"/>
+              </a:rPr>
+              <a:t>•  </a:t>
+            </a:r>
+            <a:r>
+              <a:rPr sz="1400" b="0" i="0">
+                <a:solidFill>
+                  <a:srgbClr val="11202B"/>
+                </a:solidFill>
+                <a:latin typeface="Malgun Gothic"/>
+                <a:ea typeface="Malgun Gothic"/>
+                <a:cs typeface="Malgun Gothic"/>
+              </a:rPr>
+              <a:t>3. 가공이 실패해 성숙한 mRNA가 되지 못했다</a:t>
             </a:r>
           </a:p>
           <a:p>
